--- a/10-Knowledge-Products/KP2-GIF/videos/module_1/en/decks/KP2_M1_Deck_v0.1.pptx
+++ b/10-Knowledge-Products/KP2-GIF/videos/module_1/en/decks/KP2_M1_Deck_v0.1.pptx
@@ -3293,7 +3293,7 @@
           <a:lstStyle/>
           <a:p>
             <a:r>
-              <a:t>VO: If your country has done the Enterprise Architecture work — Knowledge Product 1 — you already have a first-cut integration map: a picture of which government systems ought to exchange what. That map is the input to this step. If you do not have one yet, build it first — inventory your government's systems, who owns them and the data they hold, and sketch which ought to exchange what. That inventory is the Discover-and-Assess work KP1 covers, and it is the precondition for everything in this knowledge product; without a picture of your current systems, you cannot rank the exchanges worth building. On its own, a map of everything-connects-to-everything is overwhelming and undeployable. The Use-Case Catalogue turns it into a ranked list of specific exchanges, so the framework starts with the few that matter most instead of trying to boil the ocean.</a:t>
+              <a:t>VO: If your country has already planned its Enterprise Architecture — the whole-of-government picture of which systems exist and how they should fit together — you already have a first-cut integration map: a picture of which government systems ought to exchange what. That map is the input to this step. If you do not have one yet, build it first — inventory your government's systems, who owns them and the data they hold, and sketch which ought to exchange what. That inventory is the first step of any Enterprise Architecture — discovering what exists and assessing it — and the companion knowledge product on Government Enterprise Architecture walks you through it. It is the precondition for everything in this knowledge product; without a picture of your current systems, you cannot rank the exchanges worth building. On its own, a map of everything-connects-to-everything is overwhelming and undeployable. The Use-Case Catalogue turns it into a ranked list of specific exchanges, so the framework starts with the few that matter most instead of trying to boil the ocean.</a:t>
             </a:r>
           </a:p>
         </p:txBody>
@@ -26255,7 +26255,23 @@
                 </a:solidFill>
                 <a:latin typeface="Arial"/>
               </a:rPr>
-              <a:t>Your integration map from KP1 is the input. No map yet? Inventory your systems first.</a:t>
+              <a:t>Start from your integration map: which government systems ought to exchange what.</a:t>
+            </a:r>
+          </a:p>
+          <a:p>
+            <a:pPr>
+              <a:spcAft>
+                <a:spcPts val="800"/>
+              </a:spcAft>
+            </a:pPr>
+            <a:r>
+              <a:rPr sz="1700" b="0" i="0">
+                <a:solidFill>
+                  <a:srgbClr val="595959"/>
+                </a:solidFill>
+                <a:latin typeface="Arial"/>
+              </a:rPr>
+              <a:t>No map yet? Inventory your systems, who owns them and the data they hold — first.</a:t>
             </a:r>
           </a:p>
           <a:p>

--- a/10-Knowledge-Products/KP2-GIF/videos/module_1/en/decks/KP2_M1_Deck_v0.1.pptx
+++ b/10-Knowledge-Products/KP2-GIF/videos/module_1/en/decks/KP2_M1_Deck_v0.1.pptx
@@ -1933,7 +1933,7 @@
           <a:lstStyle/>
           <a:p>
             <a:r>
-              <a:t>Cover for the combined Module 1 deck. Each section that follows is one standalone ~4–5 minute video. This is the Strategist-facing entry point to KP2 — the national interoperability authority, the ministry CIO, the Ministry of Justice sponsor, the development-partner lead. Where KP1 taught how to plan the architecture, KP2 teaches how to build the interoperability layer over it.</a:t>
+              <a:t>Cover for the combined Module 1 deck. Each section that follows is one standalone ~4–5 minute video. This is the Strategist-facing entry point to KP2 — the national interoperability authority, the ministry CIO, the Ministry of Justice sponsor, the development-partner lead. Where Enterprise Architecture plans the whole of government, this knowledge product teaches how to build the interoperability layer over that plan.</a:t>
             </a:r>
           </a:p>
         </p:txBody>
@@ -4297,7 +4297,7 @@
           <a:lstStyle/>
           <a:p>
             <a:r>
-              <a:t>VO: One warning the stakeholder map makes visible. All of this — the tiers, the providers and consumers, the agreements — needs a body that governs the framework as a whole: that admits new members, sets the service levels, and resolves disputes when two agencies disagree. An interoperability platform with no owner decays in its second year, when the founding enthusiasm fades and no one is accountable for keeping it healthy. Designing that governing body is the subject of a later topic. The stakeholder map is what shows you why it is not optional.</a:t>
+              <a:t>VO: One warning the stakeholder map makes visible. All of this — the tiers, the providers and consumers, the agreements — needs a body that governs the framework as a whole: that admits new members, sets the service levels, and resolves disputes when two agencies disagree. An interoperability platform with no owner decays in its second year, when the founding enthusiasm fades and no one is accountable for keeping it healthy. Designing that governing body is the subject of a later module. The stakeholder map is what shows you why it is not optional.</a:t>
             </a:r>
           </a:p>
         </p:txBody>
